--- a/drug_preprocess.pptx
+++ b/drug_preprocess.pptx
@@ -6,6 +6,7 @@
   </p:sldMasterIdLst>
   <p:sldIdLst>
     <p:sldId id="256" r:id="rId3"/>
+    <p:sldId id="257" r:id="rId4"/>
   </p:sldIdLst>
   <p:sldSz cx="8459470" cy="5399405" type="screen4x3"/>
   <p:notesSz cx="6858000" cy="9144000"/>
@@ -2820,7 +2821,7 @@
         <a:spcBef>
           <a:spcPct val="20000"/>
         </a:spcBef>
-        <a:buFont typeface="Arial" panose="020B0604020202090204"/>
+        <a:buFont typeface="Arial" panose="020B0604020202020204"/>
         <a:buChar char="•"/>
         <a:defRPr sz="3200" kern="1200">
           <a:solidFill>
@@ -2835,7 +2836,7 @@
         <a:spcBef>
           <a:spcPct val="20000"/>
         </a:spcBef>
-        <a:buFont typeface="Arial" panose="020B0604020202090204"/>
+        <a:buFont typeface="Arial" panose="020B0604020202020204"/>
         <a:buChar char="–"/>
         <a:defRPr sz="2800" kern="1200">
           <a:solidFill>
@@ -2850,7 +2851,7 @@
         <a:spcBef>
           <a:spcPct val="20000"/>
         </a:spcBef>
-        <a:buFont typeface="Arial" panose="020B0604020202090204"/>
+        <a:buFont typeface="Arial" panose="020B0604020202020204"/>
         <a:buChar char="•"/>
         <a:defRPr sz="2400" kern="1200">
           <a:solidFill>
@@ -2865,7 +2866,7 @@
         <a:spcBef>
           <a:spcPct val="20000"/>
         </a:spcBef>
-        <a:buFont typeface="Arial" panose="020B0604020202090204"/>
+        <a:buFont typeface="Arial" panose="020B0604020202020204"/>
         <a:buChar char="–"/>
         <a:defRPr sz="2000" kern="1200">
           <a:solidFill>
@@ -2880,7 +2881,7 @@
         <a:spcBef>
           <a:spcPct val="20000"/>
         </a:spcBef>
-        <a:buFont typeface="Arial" panose="020B0604020202090204"/>
+        <a:buFont typeface="Arial" panose="020B0604020202020204"/>
         <a:buChar char="»"/>
         <a:defRPr sz="2000" kern="1200">
           <a:solidFill>
@@ -2895,7 +2896,7 @@
         <a:spcBef>
           <a:spcPct val="20000"/>
         </a:spcBef>
-        <a:buFont typeface="Arial" panose="020B0604020202090204"/>
+        <a:buFont typeface="Arial" panose="020B0604020202020204"/>
         <a:buChar char="•"/>
         <a:defRPr sz="2000" kern="1200">
           <a:solidFill>
@@ -2910,7 +2911,7 @@
         <a:spcBef>
           <a:spcPct val="20000"/>
         </a:spcBef>
-        <a:buFont typeface="Arial" panose="020B0604020202090204"/>
+        <a:buFont typeface="Arial" panose="020B0604020202020204"/>
         <a:buChar char="•"/>
         <a:defRPr sz="2000" kern="1200">
           <a:solidFill>
@@ -2925,7 +2926,7 @@
         <a:spcBef>
           <a:spcPct val="20000"/>
         </a:spcBef>
-        <a:buFont typeface="Arial" panose="020B0604020202090204"/>
+        <a:buFont typeface="Arial" panose="020B0604020202020204"/>
         <a:buChar char="•"/>
         <a:defRPr sz="2000" kern="1200">
           <a:solidFill>
@@ -2940,7 +2941,7 @@
         <a:spcBef>
           <a:spcPct val="20000"/>
         </a:spcBef>
-        <a:buFont typeface="Arial" panose="020B0604020202090204"/>
+        <a:buFont typeface="Arial" panose="020B0604020202020204"/>
         <a:buChar char="•"/>
         <a:defRPr sz="2000" kern="1200">
           <a:solidFill>
@@ -3108,7 +3109,7 @@
               <a:solidFill>
                 <a:srgbClr val="282828"/>
               </a:solidFill>
-              <a:latin typeface="Arial" panose="020B0604020202090204"/>
+              <a:latin typeface="Arial" panose="020B0604020202020204"/>
             </a:endParaRPr>
           </a:p>
         </p:txBody>
@@ -3157,7 +3158,7 @@
                 <a:solidFill>
                   <a:srgbClr val="282828"/>
                 </a:solidFill>
-                <a:latin typeface="Arial" panose="020B0604020202090204"/>
+                <a:latin typeface="Arial" panose="020B0604020202020204"/>
               </a:rPr>
               <a:t>SMILES</a:t>
             </a:r>
@@ -3165,7 +3166,7 @@
               <a:solidFill>
                 <a:srgbClr val="282828"/>
               </a:solidFill>
-              <a:latin typeface="Arial" panose="020B0604020202090204"/>
+              <a:latin typeface="Arial" panose="020B0604020202020204"/>
             </a:endParaRPr>
           </a:p>
         </p:txBody>
@@ -3186,7 +3187,7 @@
         </p:blipFill>
         <p:spPr>
           <a:xfrm>
-            <a:off x="432000" y="2088000"/>
+            <a:off x="385010" y="2162295"/>
             <a:ext cx="1209600" cy="864000"/>
           </a:xfrm>
           <a:prstGeom prst="rect">
@@ -3238,7 +3239,7 @@
                 <a:solidFill>
                   <a:srgbClr val="5F5F5F"/>
                 </a:solidFill>
-                <a:latin typeface="Arial" panose="020B0604020202090204"/>
+                <a:latin typeface="Arial" panose="020B0604020202020204"/>
               </a:rPr>
               <a:t>CC(=O)Oc1ccccc1C(=O)O</a:t>
             </a:r>
@@ -3246,7 +3247,7 @@
               <a:solidFill>
                 <a:srgbClr val="5F5F5F"/>
               </a:solidFill>
-              <a:latin typeface="Arial" panose="020B0604020202090204"/>
+              <a:latin typeface="Arial" panose="020B0604020202020204"/>
             </a:endParaRPr>
           </a:p>
         </p:txBody>
@@ -3295,7 +3296,7 @@
                 <a:solidFill>
                   <a:srgbClr val="266E46"/>
                 </a:solidFill>
-                <a:latin typeface="Arial" panose="020B0604020202090204"/>
+                <a:latin typeface="Arial" panose="020B0604020202020204"/>
               </a:rPr>
               <a:t>① 1D · Sequence</a:t>
             </a:r>
@@ -3303,7 +3304,7 @@
               <a:solidFill>
                 <a:srgbClr val="266E46"/>
               </a:solidFill>
-              <a:latin typeface="Arial" panose="020B0604020202090204"/>
+              <a:latin typeface="Arial" panose="020B0604020202020204"/>
             </a:endParaRPr>
           </a:p>
         </p:txBody>
@@ -3354,7 +3355,7 @@
                 <a:solidFill>
                   <a:srgbClr val="266E46"/>
                 </a:solidFill>
-                <a:latin typeface="Arial" panose="020B0604020202090204"/>
+                <a:latin typeface="Arial" panose="020B0604020202020204"/>
               </a:rPr>
               <a:t>BPE Tokenizer</a:t>
             </a:r>
@@ -3362,7 +3363,7 @@
               <a:solidFill>
                 <a:srgbClr val="266E46"/>
               </a:solidFill>
-              <a:latin typeface="Arial" panose="020B0604020202090204"/>
+              <a:latin typeface="Arial" panose="020B0604020202020204"/>
             </a:endParaRPr>
           </a:p>
           <a:p>
@@ -3372,7 +3373,7 @@
                 <a:solidFill>
                   <a:srgbClr val="266E46"/>
                 </a:solidFill>
-                <a:latin typeface="Arial" panose="020B0604020202090204"/>
+                <a:latin typeface="Arial" panose="020B0604020202020204"/>
               </a:rPr>
               <a:t>(AutoTokenizer)</a:t>
             </a:r>
@@ -3380,7 +3381,7 @@
               <a:solidFill>
                 <a:srgbClr val="266E46"/>
               </a:solidFill>
-              <a:latin typeface="Arial" panose="020B0604020202090204"/>
+              <a:latin typeface="Arial" panose="020B0604020202020204"/>
             </a:endParaRPr>
           </a:p>
         </p:txBody>
@@ -3431,7 +3432,7 @@
                 <a:solidFill>
                   <a:srgbClr val="266E46"/>
                 </a:solidFill>
-                <a:latin typeface="Arial" panose="020B0604020202090204"/>
+                <a:latin typeface="Arial" panose="020B0604020202020204"/>
               </a:rPr>
               <a:t>ChemBERTa-77M-MTR</a:t>
             </a:r>
@@ -3439,7 +3440,7 @@
               <a:solidFill>
                 <a:srgbClr val="266E46"/>
               </a:solidFill>
-              <a:latin typeface="Arial" panose="020B0604020202090204"/>
+              <a:latin typeface="Arial" panose="020B0604020202020204"/>
             </a:endParaRPr>
           </a:p>
           <a:p>
@@ -3449,7 +3450,7 @@
                 <a:solidFill>
                   <a:srgbClr val="266E46"/>
                 </a:solidFill>
-                <a:latin typeface="Arial" panose="020B0604020202090204"/>
+                <a:latin typeface="Arial" panose="020B0604020202020204"/>
               </a:rPr>
               <a:t>(frozen)</a:t>
             </a:r>
@@ -3457,7 +3458,7 @@
               <a:solidFill>
                 <a:srgbClr val="266E46"/>
               </a:solidFill>
-              <a:latin typeface="Arial" panose="020B0604020202090204"/>
+              <a:latin typeface="Arial" panose="020B0604020202020204"/>
             </a:endParaRPr>
           </a:p>
         </p:txBody>
@@ -3509,7 +3510,7 @@
               <a:solidFill>
                 <a:srgbClr val="282828"/>
               </a:solidFill>
-              <a:latin typeface="Arial" panose="020B0604020202090204"/>
+              <a:latin typeface="Arial" panose="020B0604020202020204"/>
             </a:endParaRPr>
           </a:p>
         </p:txBody>
@@ -3792,7 +3793,7 @@
                 <a:solidFill>
                   <a:srgbClr val="2854A2"/>
                 </a:solidFill>
-                <a:latin typeface="Arial" panose="020B0604020202090204"/>
+                <a:latin typeface="Arial" panose="020B0604020202020204"/>
               </a:rPr>
               <a:t>② 2D · Graph</a:t>
             </a:r>
@@ -3800,7 +3801,7 @@
               <a:solidFill>
                 <a:srgbClr val="2854A2"/>
               </a:solidFill>
-              <a:latin typeface="Arial" panose="020B0604020202090204"/>
+              <a:latin typeface="Arial" panose="020B0604020202020204"/>
             </a:endParaRPr>
           </a:p>
         </p:txBody>
@@ -3851,7 +3852,7 @@
                 <a:solidFill>
                   <a:srgbClr val="2854A2"/>
                 </a:solidFill>
-                <a:latin typeface="Arial" panose="020B0604020202090204"/>
+                <a:latin typeface="Arial" panose="020B0604020202020204"/>
               </a:rPr>
               <a:t>RDKit parse</a:t>
             </a:r>
@@ -3859,7 +3860,7 @@
               <a:solidFill>
                 <a:srgbClr val="2854A2"/>
               </a:solidFill>
-              <a:latin typeface="Arial" panose="020B0604020202090204"/>
+              <a:latin typeface="Arial" panose="020B0604020202020204"/>
             </a:endParaRPr>
           </a:p>
           <a:p>
@@ -3869,7 +3870,7 @@
                 <a:solidFill>
                   <a:srgbClr val="2854A2"/>
                 </a:solidFill>
-                <a:latin typeface="Arial" panose="020B0604020202090204"/>
+                <a:latin typeface="Arial" panose="020B0604020202020204"/>
               </a:rPr>
               <a:t>atoms · bonds</a:t>
             </a:r>
@@ -3877,7 +3878,7 @@
               <a:solidFill>
                 <a:srgbClr val="2854A2"/>
               </a:solidFill>
-              <a:latin typeface="Arial" panose="020B0604020202090204"/>
+              <a:latin typeface="Arial" panose="020B0604020202020204"/>
             </a:endParaRPr>
           </a:p>
         </p:txBody>
@@ -3928,7 +3929,7 @@
                 <a:solidFill>
                   <a:srgbClr val="2854A2"/>
                 </a:solidFill>
-                <a:latin typeface="Arial" panose="020B0604020202090204"/>
+                <a:latin typeface="Arial" panose="020B0604020202020204"/>
               </a:rPr>
               <a:t>Canonical atom/bond</a:t>
             </a:r>
@@ -3936,7 +3937,7 @@
               <a:solidFill>
                 <a:srgbClr val="2854A2"/>
               </a:solidFill>
-              <a:latin typeface="Arial" panose="020B0604020202090204"/>
+              <a:latin typeface="Arial" panose="020B0604020202020204"/>
             </a:endParaRPr>
           </a:p>
           <a:p>
@@ -3946,7 +3947,7 @@
                 <a:solidFill>
                   <a:srgbClr val="2854A2"/>
                 </a:solidFill>
-                <a:latin typeface="Arial" panose="020B0604020202090204"/>
+                <a:latin typeface="Arial" panose="020B0604020202020204"/>
               </a:rPr>
               <a:t>featurizer → DGL graph</a:t>
             </a:r>
@@ -3954,7 +3955,7 @@
               <a:solidFill>
                 <a:srgbClr val="2854A2"/>
               </a:solidFill>
-              <a:latin typeface="Arial" panose="020B0604020202090204"/>
+              <a:latin typeface="Arial" panose="020B0604020202020204"/>
             </a:endParaRPr>
           </a:p>
         </p:txBody>
@@ -3967,8 +3968,8 @@
         </p:nvSpPr>
         <p:spPr>
           <a:xfrm>
-            <a:off x="5040000" y="1962000"/>
-            <a:ext cx="3240000" cy="1404000"/>
+            <a:off x="5039995" y="1962150"/>
+            <a:ext cx="3237230" cy="1403985"/>
           </a:xfrm>
           <a:prstGeom prst="rect">
             <a:avLst/>
@@ -4006,7 +4007,7 @@
               <a:solidFill>
                 <a:srgbClr val="282828"/>
               </a:solidFill>
-              <a:latin typeface="Arial" panose="020B0604020202090204"/>
+              <a:latin typeface="Arial" panose="020B0604020202020204"/>
             </a:endParaRPr>
           </a:p>
         </p:txBody>
@@ -4235,7 +4236,7 @@
                 <a:solidFill>
                   <a:srgbClr val="B06816"/>
                 </a:solidFill>
-                <a:latin typeface="Arial" panose="020B0604020202090204"/>
+                <a:latin typeface="Arial" panose="020B0604020202020204"/>
               </a:rPr>
               <a:t>③ 3D · Conformers</a:t>
             </a:r>
@@ -4243,7 +4244,7 @@
               <a:solidFill>
                 <a:srgbClr val="B06816"/>
               </a:solidFill>
-              <a:latin typeface="Arial" panose="020B0604020202090204"/>
+              <a:latin typeface="Arial" panose="020B0604020202020204"/>
             </a:endParaRPr>
           </a:p>
         </p:txBody>
@@ -4294,7 +4295,7 @@
                 <a:solidFill>
                   <a:srgbClr val="B06816"/>
                 </a:solidFill>
-                <a:latin typeface="Arial" panose="020B0604020202090204"/>
+                <a:latin typeface="Arial" panose="020B0604020202020204"/>
               </a:rPr>
               <a:t>AddHs + ETKDGv3</a:t>
             </a:r>
@@ -4302,7 +4303,7 @@
               <a:solidFill>
                 <a:srgbClr val="B06816"/>
               </a:solidFill>
-              <a:latin typeface="Arial" panose="020B0604020202090204"/>
+              <a:latin typeface="Arial" panose="020B0604020202020204"/>
             </a:endParaRPr>
           </a:p>
           <a:p>
@@ -4312,7 +4313,7 @@
                 <a:solidFill>
                   <a:srgbClr val="B06816"/>
                 </a:solidFill>
-                <a:latin typeface="Arial" panose="020B0604020202090204"/>
+                <a:latin typeface="Arial" panose="020B0604020202020204"/>
               </a:rPr>
               <a:t>embed K confs</a:t>
             </a:r>
@@ -4320,7 +4321,7 @@
               <a:solidFill>
                 <a:srgbClr val="B06816"/>
               </a:solidFill>
-              <a:latin typeface="Arial" panose="020B0604020202090204"/>
+              <a:latin typeface="Arial" panose="020B0604020202020204"/>
             </a:endParaRPr>
           </a:p>
         </p:txBody>
@@ -4371,7 +4372,7 @@
                 <a:solidFill>
                   <a:srgbClr val="B06816"/>
                 </a:solidFill>
-                <a:latin typeface="Arial" panose="020B0604020202090204"/>
+                <a:latin typeface="Arial" panose="020B0604020202020204"/>
               </a:rPr>
               <a:t>UFF optimize</a:t>
             </a:r>
@@ -4379,7 +4380,7 @@
               <a:solidFill>
                 <a:srgbClr val="B06816"/>
               </a:solidFill>
-              <a:latin typeface="Arial" panose="020B0604020202090204"/>
+              <a:latin typeface="Arial" panose="020B0604020202020204"/>
             </a:endParaRPr>
           </a:p>
           <a:p>
@@ -4389,7 +4390,7 @@
                 <a:solidFill>
                   <a:srgbClr val="B06816"/>
                 </a:solidFill>
-                <a:latin typeface="Arial" panose="020B0604020202090204"/>
+                <a:latin typeface="Arial" panose="020B0604020202020204"/>
               </a:rPr>
               <a:t>+ energy</a:t>
             </a:r>
@@ -4397,7 +4398,7 @@
               <a:solidFill>
                 <a:srgbClr val="B06816"/>
               </a:solidFill>
-              <a:latin typeface="Arial" panose="020B0604020202090204"/>
+              <a:latin typeface="Arial" panose="020B0604020202020204"/>
             </a:endParaRPr>
           </a:p>
         </p:txBody>
@@ -4449,7 +4450,7 @@
               <a:solidFill>
                 <a:srgbClr val="282828"/>
               </a:solidFill>
-              <a:latin typeface="Arial" panose="020B0604020202090204"/>
+              <a:latin typeface="Arial" panose="020B0604020202020204"/>
             </a:endParaRPr>
           </a:p>
         </p:txBody>
@@ -4732,7 +4733,7 @@
                 <a:solidFill>
                   <a:srgbClr val="266E46"/>
                 </a:solidFill>
-                <a:latin typeface="Arial" panose="020B0604020202090204"/>
+                <a:latin typeface="Arial" panose="020B0604020202020204"/>
               </a:rPr>
               <a:t>1D Semantic Tokens</a:t>
             </a:r>
@@ -4740,7 +4741,7 @@
               <a:solidFill>
                 <a:srgbClr val="266E46"/>
               </a:solidFill>
-              <a:latin typeface="Arial" panose="020B0604020202090204"/>
+              <a:latin typeface="Arial" panose="020B0604020202020204"/>
             </a:endParaRPr>
           </a:p>
         </p:txBody>
@@ -14416,7 +14417,7 @@
                 <a:solidFill>
                   <a:srgbClr val="5F5F5F"/>
                 </a:solidFill>
-                <a:latin typeface="Arial" panose="020B0604020202090204"/>
+                <a:latin typeface="Arial" panose="020B0604020202020204"/>
               </a:rPr>
               <a:t>special tokens removed · adaptive-pooled</a:t>
             </a:r>
@@ -14424,7 +14425,7 @@
               <a:solidFill>
                 <a:srgbClr val="5F5F5F"/>
               </a:solidFill>
-              <a:latin typeface="Arial" panose="020B0604020202090204"/>
+              <a:latin typeface="Arial" panose="020B0604020202020204"/>
             </a:endParaRPr>
           </a:p>
         </p:txBody>
@@ -14473,7 +14474,7 @@
                 <a:solidFill>
                   <a:srgbClr val="2854A2"/>
                 </a:solidFill>
-                <a:latin typeface="Arial" panose="020B0604020202090204"/>
+                <a:latin typeface="Arial" panose="020B0604020202020204"/>
               </a:rPr>
               <a:t>2D Molecular Graph</a:t>
             </a:r>
@@ -14481,7 +14482,7 @@
               <a:solidFill>
                 <a:srgbClr val="2854A2"/>
               </a:solidFill>
-              <a:latin typeface="Arial" panose="020B0604020202090204"/>
+              <a:latin typeface="Arial" panose="020B0604020202020204"/>
             </a:endParaRPr>
           </a:p>
         </p:txBody>
@@ -26629,12 +26630,902 @@
           <a:lstStyle/>
           <a:p>
             <a:pPr algn="ctr"/>
+            <a:endParaRPr sz="680" b="0">
+              <a:solidFill>
+                <a:srgbClr val="5F5F5F"/>
+              </a:solidFill>
+              <a:latin typeface="Arial" panose="020B0604020202020204"/>
+            </a:endParaRPr>
+          </a:p>
+        </p:txBody>
+      </p:sp>
+      <p:sp>
+        <p:nvSpPr>
+          <p:cNvPr id="501" name="Rectangle 500"/>
+          <p:cNvSpPr/>
+          <p:nvPr/>
+        </p:nvSpPr>
+        <p:spPr>
+          <a:xfrm>
+            <a:off x="5166000" y="3726000"/>
+            <a:ext cx="2520000" cy="180000"/>
+          </a:xfrm>
+          <a:prstGeom prst="rect">
+            <a:avLst/>
+          </a:prstGeom>
+          <a:noFill/>
+          <a:ln>
+            <a:noFill/>
+          </a:ln>
+          <a:effectLst/>
+        </p:spPr>
+        <p:style>
+          <a:lnRef idx="1">
+            <a:schemeClr val="accent1"/>
+          </a:lnRef>
+          <a:fillRef idx="3">
+            <a:schemeClr val="accent1"/>
+          </a:fillRef>
+          <a:effectRef idx="2">
+            <a:schemeClr val="accent1"/>
+          </a:effectRef>
+          <a:fontRef idx="minor">
+            <a:schemeClr val="lt1"/>
+          </a:fontRef>
+        </p:style>
+        <p:txBody>
+          <a:bodyPr wrap="square" lIns="28800" tIns="14400" rIns="28800" bIns="14400" rtlCol="0" anchor="t"/>
+          <a:lstStyle/>
+          <a:p>
+            <a:pPr algn="l"/>
             <a:r>
-              <a:rPr sz="680" b="0">
+              <a:rPr sz="950" b="1">
+                <a:solidFill>
+                  <a:srgbClr val="B06816"/>
+                </a:solidFill>
+                <a:latin typeface="Arial" panose="020B0604020202020204"/>
+              </a:rPr>
+              <a:t>K Conformers + Energy</a:t>
+            </a:r>
+            <a:endParaRPr sz="950" b="1">
+              <a:solidFill>
+                <a:srgbClr val="B06816"/>
+              </a:solidFill>
+              <a:latin typeface="Arial" panose="020B0604020202020204"/>
+            </a:endParaRPr>
+          </a:p>
+        </p:txBody>
+      </p:sp>
+      <p:pic>
+        <p:nvPicPr>
+          <p:cNvPr id="502" name="Picture 501" descr="conf0.png"/>
+          <p:cNvPicPr>
+            <a:picLocks noChangeAspect="1"/>
+          </p:cNvPicPr>
+          <p:nvPr/>
+        </p:nvPicPr>
+        <p:blipFill>
+          <a:blip r:embed="rId2"/>
+          <a:stretch>
+            <a:fillRect/>
+          </a:stretch>
+        </p:blipFill>
+        <p:spPr>
+          <a:xfrm>
+            <a:off x="5133340" y="4031615"/>
+            <a:ext cx="486410" cy="432435"/>
+          </a:xfrm>
+          <a:prstGeom prst="rect">
+            <a:avLst/>
+          </a:prstGeom>
+        </p:spPr>
+      </p:pic>
+      <p:sp>
+        <p:nvSpPr>
+          <p:cNvPr id="503" name="Rectangle 502"/>
+          <p:cNvSpPr/>
+          <p:nvPr/>
+        </p:nvSpPr>
+        <p:spPr>
+          <a:xfrm>
+            <a:off x="5238115" y="4518025"/>
+            <a:ext cx="145415" cy="76200"/>
+          </a:xfrm>
+          <a:prstGeom prst="rect">
+            <a:avLst/>
+          </a:prstGeom>
+          <a:solidFill>
+            <a:srgbClr val="EEB65C"/>
+          </a:solidFill>
+          <a:ln>
+            <a:noFill/>
+          </a:ln>
+          <a:effectLst/>
+        </p:spPr>
+        <p:style>
+          <a:lnRef idx="1">
+            <a:schemeClr val="accent1"/>
+          </a:lnRef>
+          <a:fillRef idx="3">
+            <a:schemeClr val="accent1"/>
+          </a:fillRef>
+          <a:effectRef idx="2">
+            <a:schemeClr val="accent1"/>
+          </a:effectRef>
+          <a:fontRef idx="minor">
+            <a:schemeClr val="lt1"/>
+          </a:fontRef>
+        </p:style>
+        <p:txBody>
+          <a:bodyPr wrap="square" lIns="28800" tIns="14400" rIns="28800" bIns="14400" rtlCol="0" anchor="ctr"/>
+          <a:lstStyle/>
+          <a:p>
+            <a:pPr algn="ctr"/>
+            <a:endParaRPr sz="900" b="0">
+              <a:solidFill>
+                <a:srgbClr val="282828"/>
+              </a:solidFill>
+              <a:latin typeface="Arial" panose="020B0604020202020204"/>
+            </a:endParaRPr>
+          </a:p>
+        </p:txBody>
+      </p:sp>
+      <p:sp>
+        <p:nvSpPr>
+          <p:cNvPr id="504" name="Rectangle 503"/>
+          <p:cNvSpPr/>
+          <p:nvPr/>
+        </p:nvSpPr>
+        <p:spPr>
+          <a:xfrm>
+            <a:off x="5238000" y="4572000"/>
+            <a:ext cx="503999" cy="180000"/>
+          </a:xfrm>
+          <a:prstGeom prst="rect">
+            <a:avLst/>
+          </a:prstGeom>
+          <a:noFill/>
+          <a:ln>
+            <a:noFill/>
+          </a:ln>
+          <a:effectLst/>
+        </p:spPr>
+        <p:style>
+          <a:lnRef idx="1">
+            <a:schemeClr val="accent1"/>
+          </a:lnRef>
+          <a:fillRef idx="3">
+            <a:schemeClr val="accent1"/>
+          </a:fillRef>
+          <a:effectRef idx="2">
+            <a:schemeClr val="accent1"/>
+          </a:effectRef>
+          <a:fontRef idx="minor">
+            <a:schemeClr val="lt1"/>
+          </a:fontRef>
+        </p:style>
+        <p:txBody>
+          <a:bodyPr wrap="square" lIns="28800" tIns="14400" rIns="28800" bIns="14400" rtlCol="0" anchor="t"/>
+          <a:lstStyle/>
+          <a:p>
+            <a:pPr algn="l"/>
+            <a:r>
+              <a:rPr lang="en-US" altLang="zh-CN" sz="750" b="0">
+                <a:solidFill>
+                  <a:srgbClr val="B06816"/>
+                </a:solidFill>
+                <a:latin typeface="Times New Roman" panose="02020603050405020304" charset="0"/>
+                <a:cs typeface="Times New Roman" panose="02020603050405020304" charset="0"/>
+              </a:rPr>
+              <a:t>E₁</a:t>
+            </a:r>
+            <a:endParaRPr lang="en-US" altLang="zh-CN" sz="750" b="0">
+              <a:solidFill>
+                <a:srgbClr val="B06816"/>
+              </a:solidFill>
+              <a:latin typeface="Times New Roman" panose="02020603050405020304" charset="0"/>
+              <a:cs typeface="Times New Roman" panose="02020603050405020304" charset="0"/>
+            </a:endParaRPr>
+          </a:p>
+        </p:txBody>
+      </p:sp>
+      <p:pic>
+        <p:nvPicPr>
+          <p:cNvPr id="505" name="Picture 504" descr="conf1.png"/>
+          <p:cNvPicPr>
+            <a:picLocks noChangeAspect="1"/>
+          </p:cNvPicPr>
+          <p:nvPr/>
+        </p:nvPicPr>
+        <p:blipFill>
+          <a:blip r:embed="rId3"/>
+          <a:stretch>
+            <a:fillRect/>
+          </a:stretch>
+        </p:blipFill>
+        <p:spPr>
+          <a:xfrm>
+            <a:off x="5643245" y="4032250"/>
+            <a:ext cx="485140" cy="431800"/>
+          </a:xfrm>
+          <a:prstGeom prst="rect">
+            <a:avLst/>
+          </a:prstGeom>
+        </p:spPr>
+      </p:pic>
+      <p:sp>
+        <p:nvSpPr>
+          <p:cNvPr id="506" name="Rectangle 505"/>
+          <p:cNvSpPr/>
+          <p:nvPr/>
+        </p:nvSpPr>
+        <p:spPr>
+          <a:xfrm>
+            <a:off x="5777865" y="4518025"/>
+            <a:ext cx="190500" cy="76200"/>
+          </a:xfrm>
+          <a:prstGeom prst="rect">
+            <a:avLst/>
+          </a:prstGeom>
+          <a:solidFill>
+            <a:srgbClr val="EEB65C"/>
+          </a:solidFill>
+          <a:ln>
+            <a:noFill/>
+          </a:ln>
+          <a:effectLst/>
+        </p:spPr>
+        <p:style>
+          <a:lnRef idx="1">
+            <a:schemeClr val="accent1"/>
+          </a:lnRef>
+          <a:fillRef idx="3">
+            <a:schemeClr val="accent1"/>
+          </a:fillRef>
+          <a:effectRef idx="2">
+            <a:schemeClr val="accent1"/>
+          </a:effectRef>
+          <a:fontRef idx="minor">
+            <a:schemeClr val="lt1"/>
+          </a:fontRef>
+        </p:style>
+        <p:txBody>
+          <a:bodyPr wrap="square" lIns="28800" tIns="14400" rIns="28800" bIns="14400" rtlCol="0" anchor="ctr"/>
+          <a:lstStyle/>
+          <a:p>
+            <a:pPr algn="ctr"/>
+            <a:endParaRPr sz="900" b="0">
+              <a:solidFill>
+                <a:srgbClr val="282828"/>
+              </a:solidFill>
+              <a:latin typeface="Arial" panose="020B0604020202020204"/>
+            </a:endParaRPr>
+          </a:p>
+        </p:txBody>
+      </p:sp>
+      <p:sp>
+        <p:nvSpPr>
+          <p:cNvPr id="507" name="Rectangle 506"/>
+          <p:cNvSpPr/>
+          <p:nvPr/>
+        </p:nvSpPr>
+        <p:spPr>
+          <a:xfrm>
+            <a:off x="5778000" y="4572000"/>
+            <a:ext cx="503999" cy="180000"/>
+          </a:xfrm>
+          <a:prstGeom prst="rect">
+            <a:avLst/>
+          </a:prstGeom>
+          <a:noFill/>
+          <a:ln>
+            <a:noFill/>
+          </a:ln>
+          <a:effectLst/>
+        </p:spPr>
+        <p:style>
+          <a:lnRef idx="1">
+            <a:schemeClr val="accent1"/>
+          </a:lnRef>
+          <a:fillRef idx="3">
+            <a:schemeClr val="accent1"/>
+          </a:fillRef>
+          <a:effectRef idx="2">
+            <a:schemeClr val="accent1"/>
+          </a:effectRef>
+          <a:fontRef idx="minor">
+            <a:schemeClr val="lt1"/>
+          </a:fontRef>
+        </p:style>
+        <p:txBody>
+          <a:bodyPr wrap="square" lIns="28800" tIns="14400" rIns="28800" bIns="14400" rtlCol="0" anchor="t"/>
+          <a:lstStyle/>
+          <a:p>
+            <a:pPr algn="l"/>
+            <a:r>
+              <a:rPr lang="en-US" altLang="zh-CN" sz="750" b="0">
+                <a:solidFill>
+                  <a:srgbClr val="B06816"/>
+                </a:solidFill>
+                <a:latin typeface="Times New Roman" panose="02020603050405020304" charset="0"/>
+                <a:cs typeface="Times New Roman" panose="02020603050405020304" charset="0"/>
+              </a:rPr>
+              <a:t>E₂</a:t>
+            </a:r>
+            <a:endParaRPr lang="en-US" altLang="zh-CN" sz="750" b="0">
+              <a:solidFill>
+                <a:srgbClr val="B06816"/>
+              </a:solidFill>
+              <a:latin typeface="Times New Roman" panose="02020603050405020304" charset="0"/>
+              <a:cs typeface="Times New Roman" panose="02020603050405020304" charset="0"/>
+            </a:endParaRPr>
+          </a:p>
+        </p:txBody>
+      </p:sp>
+      <p:pic>
+        <p:nvPicPr>
+          <p:cNvPr id="508" name="Picture 507" descr="conf2.png"/>
+          <p:cNvPicPr>
+            <a:picLocks noChangeAspect="1"/>
+          </p:cNvPicPr>
+          <p:nvPr/>
+        </p:nvPicPr>
+        <p:blipFill>
+          <a:blip r:embed="rId4"/>
+          <a:stretch>
+            <a:fillRect/>
+          </a:stretch>
+        </p:blipFill>
+        <p:spPr>
+          <a:xfrm>
+            <a:off x="6480175" y="4050030"/>
+            <a:ext cx="465455" cy="414020"/>
+          </a:xfrm>
+          <a:prstGeom prst="rect">
+            <a:avLst/>
+          </a:prstGeom>
+        </p:spPr>
+      </p:pic>
+      <p:sp>
+        <p:nvSpPr>
+          <p:cNvPr id="509" name="Rectangle 508"/>
+          <p:cNvSpPr/>
+          <p:nvPr/>
+        </p:nvSpPr>
+        <p:spPr>
+          <a:xfrm>
+            <a:off x="6488430" y="4518025"/>
+            <a:ext cx="449580" cy="76200"/>
+          </a:xfrm>
+          <a:prstGeom prst="rect">
+            <a:avLst/>
+          </a:prstGeom>
+          <a:solidFill>
+            <a:srgbClr val="EEB65C"/>
+          </a:solidFill>
+          <a:ln>
+            <a:noFill/>
+          </a:ln>
+          <a:effectLst/>
+        </p:spPr>
+        <p:style>
+          <a:lnRef idx="1">
+            <a:schemeClr val="accent1"/>
+          </a:lnRef>
+          <a:fillRef idx="3">
+            <a:schemeClr val="accent1"/>
+          </a:fillRef>
+          <a:effectRef idx="2">
+            <a:schemeClr val="accent1"/>
+          </a:effectRef>
+          <a:fontRef idx="minor">
+            <a:schemeClr val="lt1"/>
+          </a:fontRef>
+        </p:style>
+        <p:txBody>
+          <a:bodyPr wrap="square" lIns="28800" tIns="14400" rIns="28800" bIns="14400" rtlCol="0" anchor="ctr"/>
+          <a:lstStyle/>
+          <a:p>
+            <a:pPr algn="ctr"/>
+            <a:endParaRPr sz="900" b="0">
+              <a:solidFill>
+                <a:srgbClr val="282828"/>
+              </a:solidFill>
+              <a:latin typeface="Arial" panose="020B0604020202020204"/>
+            </a:endParaRPr>
+          </a:p>
+        </p:txBody>
+      </p:sp>
+      <p:sp>
+        <p:nvSpPr>
+          <p:cNvPr id="510" name="Rectangle 509"/>
+          <p:cNvSpPr/>
+          <p:nvPr/>
+        </p:nvSpPr>
+        <p:spPr>
+          <a:xfrm>
+            <a:off x="6635500" y="4572000"/>
+            <a:ext cx="503999" cy="180000"/>
+          </a:xfrm>
+          <a:prstGeom prst="rect">
+            <a:avLst/>
+          </a:prstGeom>
+          <a:noFill/>
+          <a:ln>
+            <a:noFill/>
+          </a:ln>
+          <a:effectLst/>
+        </p:spPr>
+        <p:style>
+          <a:lnRef idx="1">
+            <a:schemeClr val="accent1"/>
+          </a:lnRef>
+          <a:fillRef idx="3">
+            <a:schemeClr val="accent1"/>
+          </a:fillRef>
+          <a:effectRef idx="2">
+            <a:schemeClr val="accent1"/>
+          </a:effectRef>
+          <a:fontRef idx="minor">
+            <a:schemeClr val="lt1"/>
+          </a:fontRef>
+        </p:style>
+        <p:txBody>
+          <a:bodyPr wrap="square" lIns="28800" tIns="14400" rIns="28800" bIns="14400" rtlCol="0" anchor="t"/>
+          <a:lstStyle/>
+          <a:p>
+            <a:pPr algn="l"/>
+            <a:r>
+              <a:rPr lang="en-US" altLang="zh-CN" sz="750" b="0">
+                <a:solidFill>
+                  <a:srgbClr val="B06816"/>
+                </a:solidFill>
+                <a:latin typeface="Arial" panose="020B0604020202020204"/>
+              </a:rPr>
+              <a:t>E</a:t>
+            </a:r>
+            <a:r>
+              <a:rPr lang="en-US" altLang="en-US" sz="750" b="0">
+                <a:solidFill>
+                  <a:srgbClr val="B06816"/>
+                </a:solidFill>
+                <a:latin typeface="Arial" panose="020B0604020202020204"/>
+              </a:rPr>
+              <a:t>ₖ</a:t>
+            </a:r>
+            <a:endParaRPr lang="en-US" altLang="en-US" sz="750" b="0">
+              <a:solidFill>
+                <a:srgbClr val="B06816"/>
+              </a:solidFill>
+              <a:latin typeface="Arial" panose="020B0604020202020204"/>
+            </a:endParaRPr>
+          </a:p>
+        </p:txBody>
+      </p:sp>
+      <p:sp>
+        <p:nvSpPr>
+          <p:cNvPr id="511" name="Rectangle 510"/>
+          <p:cNvSpPr/>
+          <p:nvPr/>
+        </p:nvSpPr>
+        <p:spPr>
+          <a:xfrm>
+            <a:off x="5205810" y="4752000"/>
+            <a:ext cx="1655999" cy="180000"/>
+          </a:xfrm>
+          <a:prstGeom prst="rect">
+            <a:avLst/>
+          </a:prstGeom>
+          <a:noFill/>
+          <a:ln>
+            <a:noFill/>
+          </a:ln>
+          <a:effectLst/>
+        </p:spPr>
+        <p:style>
+          <a:lnRef idx="1">
+            <a:schemeClr val="accent1"/>
+          </a:lnRef>
+          <a:fillRef idx="3">
+            <a:schemeClr val="accent1"/>
+          </a:fillRef>
+          <a:effectRef idx="2">
+            <a:schemeClr val="accent1"/>
+          </a:effectRef>
+          <a:fontRef idx="minor">
+            <a:schemeClr val="lt1"/>
+          </a:fontRef>
+        </p:style>
+        <p:txBody>
+          <a:bodyPr wrap="square" lIns="28800" tIns="14400" rIns="28800" bIns="14400" rtlCol="0" anchor="t"/>
+          <a:lstStyle/>
+          <a:p>
+            <a:pPr algn="ctr"/>
+            <a:r>
+              <a:rPr sz="750" b="0">
                 <a:solidFill>
                   <a:srgbClr val="5F5F5F"/>
                 </a:solidFill>
-                <a:latin typeface="Arial" panose="020B0604020202090204"/>
+                <a:latin typeface="Times New Roman" panose="02020603050405020304" charset="0"/>
+                <a:cs typeface="Times New Roman" panose="02020603050405020304" charset="0"/>
+              </a:rPr>
+              <a:t>K conformers</a:t>
+            </a:r>
+            <a:r>
+              <a:rPr lang="en-US" sz="750" b="0">
+                <a:solidFill>
+                  <a:srgbClr val="5F5F5F"/>
+                </a:solidFill>
+                <a:latin typeface="Times New Roman" panose="02020603050405020304" charset="0"/>
+                <a:cs typeface="Times New Roman" panose="02020603050405020304" charset="0"/>
+              </a:rPr>
+              <a:t>(</a:t>
+            </a:r>
+            <a:r>
+              <a:rPr sz="750" b="0">
+                <a:solidFill>
+                  <a:srgbClr val="5F5F5F"/>
+                </a:solidFill>
+                <a:latin typeface="Times New Roman" panose="02020603050405020304" charset="0"/>
+                <a:cs typeface="Times New Roman" panose="02020603050405020304" charset="0"/>
+              </a:rPr>
+              <a:t>sorted by energy</a:t>
+            </a:r>
+            <a:r>
+              <a:rPr lang="en-US" sz="750" b="0">
+                <a:solidFill>
+                  <a:srgbClr val="5F5F5F"/>
+                </a:solidFill>
+                <a:latin typeface="Times New Roman" panose="02020603050405020304" charset="0"/>
+                <a:cs typeface="Times New Roman" panose="02020603050405020304" charset="0"/>
+              </a:rPr>
+              <a:t>)</a:t>
+            </a:r>
+            <a:r>
+              <a:rPr sz="750" b="0">
+                <a:solidFill>
+                  <a:srgbClr val="5F5F5F"/>
+                </a:solidFill>
+                <a:latin typeface="Times New Roman" panose="02020603050405020304" charset="0"/>
+                <a:cs typeface="Times New Roman" panose="02020603050405020304" charset="0"/>
+              </a:rPr>
+              <a:t> </a:t>
+            </a:r>
+            <a:endParaRPr sz="750" b="0">
+              <a:solidFill>
+                <a:srgbClr val="5F5F5F"/>
+              </a:solidFill>
+              <a:latin typeface="Times New Roman" panose="02020603050405020304" charset="0"/>
+              <a:cs typeface="Times New Roman" panose="02020603050405020304" charset="0"/>
+            </a:endParaRPr>
+          </a:p>
+        </p:txBody>
+      </p:sp>
+      <p:sp>
+        <p:nvSpPr>
+          <p:cNvPr id="512" name="Rectangle 511"/>
+          <p:cNvSpPr/>
+          <p:nvPr/>
+        </p:nvSpPr>
+        <p:spPr>
+          <a:xfrm>
+            <a:off x="7089140" y="4222750"/>
+            <a:ext cx="1240790" cy="877570"/>
+          </a:xfrm>
+          <a:prstGeom prst="rect">
+            <a:avLst/>
+          </a:prstGeom>
+          <a:noFill/>
+          <a:ln>
+            <a:noFill/>
+          </a:ln>
+          <a:effectLst/>
+        </p:spPr>
+        <p:style>
+          <a:lnRef idx="1">
+            <a:schemeClr val="accent1"/>
+          </a:lnRef>
+          <a:fillRef idx="3">
+            <a:schemeClr val="accent1"/>
+          </a:fillRef>
+          <a:effectRef idx="2">
+            <a:schemeClr val="accent1"/>
+          </a:effectRef>
+          <a:fontRef idx="minor">
+            <a:schemeClr val="lt1"/>
+          </a:fontRef>
+        </p:style>
+        <p:txBody>
+          <a:bodyPr wrap="square" lIns="18000" tIns="10800" rIns="18000" bIns="10800" rtlCol="0" anchor="ctr"/>
+          <a:lstStyle/>
+          <a:p>
+            <a:pPr algn="l">
+              <a:spcAft>
+                <a:spcPts val="300"/>
+              </a:spcAft>
+            </a:pPr>
+            <a:r>
+              <a:rPr sz="700" b="1">
+                <a:solidFill>
+                  <a:srgbClr val="B06816"/>
+                </a:solidFill>
+                <a:latin typeface="Times New Roman" panose="02020603050405020304" charset="0"/>
+                <a:cs typeface="Times New Roman" panose="02020603050405020304" charset="0"/>
+              </a:rPr>
+              <a:t>atom feats  </a:t>
+            </a:r>
+            <a:r>
+              <a:rPr sz="700" b="1">
+                <a:solidFill>
+                  <a:srgbClr val="282828"/>
+                </a:solidFill>
+                <a:latin typeface="Times New Roman" panose="02020603050405020304" charset="0"/>
+                <a:cs typeface="Times New Roman" panose="02020603050405020304" charset="0"/>
+              </a:rPr>
+              <a:t>[K×64×128]</a:t>
+            </a:r>
+            <a:endParaRPr sz="700" b="1">
+              <a:solidFill>
+                <a:srgbClr val="282828"/>
+              </a:solidFill>
+              <a:latin typeface="Times New Roman" panose="02020603050405020304" charset="0"/>
+              <a:cs typeface="Times New Roman" panose="02020603050405020304" charset="0"/>
+            </a:endParaRPr>
+          </a:p>
+          <a:p>
+            <a:pPr algn="l">
+              <a:spcAft>
+                <a:spcPts val="300"/>
+              </a:spcAft>
+            </a:pPr>
+            <a:r>
+              <a:rPr sz="700" b="1">
+                <a:solidFill>
+                  <a:srgbClr val="B06816"/>
+                </a:solidFill>
+                <a:latin typeface="Times New Roman" panose="02020603050405020304" charset="0"/>
+                <a:cs typeface="Times New Roman" panose="02020603050405020304" charset="0"/>
+              </a:rPr>
+              <a:t>coords  </a:t>
+            </a:r>
+            <a:r>
+              <a:rPr sz="700" b="1">
+                <a:solidFill>
+                  <a:srgbClr val="282828"/>
+                </a:solidFill>
+                <a:latin typeface="Times New Roman" panose="02020603050405020304" charset="0"/>
+                <a:cs typeface="Times New Roman" panose="02020603050405020304" charset="0"/>
+              </a:rPr>
+              <a:t>[K×64×3]</a:t>
+            </a:r>
+            <a:r>
+              <a:rPr sz="700" b="0">
+                <a:solidFill>
+                  <a:srgbClr val="787878"/>
+                </a:solidFill>
+                <a:latin typeface="Times New Roman" panose="02020603050405020304" charset="0"/>
+                <a:cs typeface="Times New Roman" panose="02020603050405020304" charset="0"/>
+              </a:rPr>
+              <a:t>  (x,y,z)</a:t>
+            </a:r>
+            <a:endParaRPr sz="700" b="0">
+              <a:solidFill>
+                <a:srgbClr val="787878"/>
+              </a:solidFill>
+              <a:latin typeface="Times New Roman" panose="02020603050405020304" charset="0"/>
+              <a:cs typeface="Times New Roman" panose="02020603050405020304" charset="0"/>
+            </a:endParaRPr>
+          </a:p>
+          <a:p>
+            <a:pPr algn="l">
+              <a:spcAft>
+                <a:spcPts val="300"/>
+              </a:spcAft>
+            </a:pPr>
+            <a:r>
+              <a:rPr sz="700" b="1">
+                <a:solidFill>
+                  <a:srgbClr val="B06816"/>
+                </a:solidFill>
+                <a:latin typeface="Times New Roman" panose="02020603050405020304" charset="0"/>
+                <a:cs typeface="Times New Roman" panose="02020603050405020304" charset="0"/>
+              </a:rPr>
+              <a:t>energy  </a:t>
+            </a:r>
+            <a:r>
+              <a:rPr sz="700" b="1">
+                <a:solidFill>
+                  <a:srgbClr val="282828"/>
+                </a:solidFill>
+                <a:latin typeface="Times New Roman" panose="02020603050405020304" charset="0"/>
+                <a:cs typeface="Times New Roman" panose="02020603050405020304" charset="0"/>
+              </a:rPr>
+              <a:t>[K]</a:t>
+            </a:r>
+            <a:r>
+              <a:rPr sz="700" b="0">
+                <a:solidFill>
+                  <a:srgbClr val="787878"/>
+                </a:solidFill>
+                <a:latin typeface="Times New Roman" panose="02020603050405020304" charset="0"/>
+                <a:cs typeface="Times New Roman" panose="02020603050405020304" charset="0"/>
+              </a:rPr>
+              <a:t>  UFF → z-score</a:t>
+            </a:r>
+            <a:endParaRPr sz="700" b="0">
+              <a:solidFill>
+                <a:srgbClr val="787878"/>
+              </a:solidFill>
+              <a:latin typeface="Times New Roman" panose="02020603050405020304" charset="0"/>
+              <a:cs typeface="Times New Roman" panose="02020603050405020304" charset="0"/>
+            </a:endParaRPr>
+          </a:p>
+          <a:p>
+            <a:pPr algn="l">
+              <a:spcAft>
+                <a:spcPts val="300"/>
+              </a:spcAft>
+            </a:pPr>
+            <a:r>
+              <a:rPr sz="700" b="1">
+                <a:solidFill>
+                  <a:srgbClr val="B06816"/>
+                </a:solidFill>
+                <a:latin typeface="Times New Roman" panose="02020603050405020304" charset="0"/>
+                <a:cs typeface="Times New Roman" panose="02020603050405020304" charset="0"/>
+              </a:rPr>
+              <a:t>conf_mask  </a:t>
+            </a:r>
+            <a:r>
+              <a:rPr sz="700" b="1">
+                <a:solidFill>
+                  <a:srgbClr val="282828"/>
+                </a:solidFill>
+                <a:latin typeface="Times New Roman" panose="02020603050405020304" charset="0"/>
+                <a:cs typeface="Times New Roman" panose="02020603050405020304" charset="0"/>
+              </a:rPr>
+              <a:t>[K]</a:t>
+            </a:r>
+            <a:r>
+              <a:rPr sz="700" b="0">
+                <a:solidFill>
+                  <a:srgbClr val="787878"/>
+                </a:solidFill>
+                <a:latin typeface="Times New Roman" panose="02020603050405020304" charset="0"/>
+                <a:cs typeface="Times New Roman" panose="02020603050405020304" charset="0"/>
+              </a:rPr>
+              <a:t>  valid confs</a:t>
+            </a:r>
+            <a:endParaRPr sz="700" b="0">
+              <a:solidFill>
+                <a:srgbClr val="787878"/>
+              </a:solidFill>
+              <a:latin typeface="Times New Roman" panose="02020603050405020304" charset="0"/>
+              <a:cs typeface="Times New Roman" panose="02020603050405020304" charset="0"/>
+            </a:endParaRPr>
+          </a:p>
+        </p:txBody>
+      </p:sp>
+      <p:sp>
+        <p:nvSpPr>
+          <p:cNvPr id="514" name="文本框 513"/>
+          <p:cNvSpPr txBox="1"/>
+          <p:nvPr/>
+        </p:nvSpPr>
+        <p:spPr>
+          <a:xfrm>
+            <a:off x="6144895" y="4032250"/>
+            <a:ext cx="540385" cy="368300"/>
+          </a:xfrm>
+          <a:prstGeom prst="rect">
+            <a:avLst/>
+          </a:prstGeom>
+          <a:noFill/>
+        </p:spPr>
+        <p:txBody>
+          <a:bodyPr wrap="square" rtlCol="0">
+            <a:spAutoFit/>
+          </a:bodyPr>
+          <a:p>
+            <a:r>
+              <a:rPr lang="en-US" altLang="zh-CN">
+                <a:gradFill>
+                  <a:gsLst>
+                    <a:gs pos="50000">
+                      <a:schemeClr val="accent6"/>
+                    </a:gs>
+                    <a:gs pos="0">
+                      <a:schemeClr val="accent6">
+                        <a:lumMod val="25000"/>
+                        <a:lumOff val="75000"/>
+                      </a:schemeClr>
+                    </a:gs>
+                    <a:gs pos="100000">
+                      <a:schemeClr val="accent6">
+                        <a:lumMod val="85000"/>
+                      </a:schemeClr>
+                    </a:gs>
+                  </a:gsLst>
+                  <a:lin ang="5400000" scaled="1"/>
+                </a:gradFill>
+                <a:latin typeface="Times New Roman" panose="02020603050405020304" charset="0"/>
+                <a:cs typeface="Times New Roman" panose="02020603050405020304" charset="0"/>
+              </a:rPr>
+              <a:t>...</a:t>
+            </a:r>
+            <a:endParaRPr lang="en-US" altLang="zh-CN">
+              <a:gradFill>
+                <a:gsLst>
+                  <a:gs pos="50000">
+                    <a:schemeClr val="accent6"/>
+                  </a:gs>
+                  <a:gs pos="0">
+                    <a:schemeClr val="accent6">
+                      <a:lumMod val="25000"/>
+                      <a:lumOff val="75000"/>
+                    </a:schemeClr>
+                  </a:gs>
+                  <a:gs pos="100000">
+                    <a:schemeClr val="accent6">
+                      <a:lumMod val="85000"/>
+                    </a:schemeClr>
+                  </a:gs>
+                </a:gsLst>
+                <a:lin ang="5400000" scaled="1"/>
+              </a:gradFill>
+              <a:latin typeface="Times New Roman" panose="02020603050405020304" charset="0"/>
+              <a:cs typeface="Times New Roman" panose="02020603050405020304" charset="0"/>
+            </a:endParaRPr>
+          </a:p>
+        </p:txBody>
+      </p:sp>
+    </p:spTree>
+  </p:cSld>
+  <p:clrMapOvr>
+    <a:masterClrMapping/>
+  </p:clrMapOvr>
+</p:sld>
+</file>
+
+<file path=ppt/slides/slide2.xml><?xml version="1.0" encoding="utf-8"?>
+<p:sld xmlns:a="http://schemas.openxmlformats.org/drawingml/2006/main" xmlns:r="http://schemas.openxmlformats.org/officeDocument/2006/relationships" xmlns:p="http://schemas.openxmlformats.org/presentationml/2006/main">
+  <p:cSld>
+    <p:spTree>
+      <p:nvGrpSpPr>
+        <p:cNvPr id="1" name=""/>
+        <p:cNvGrpSpPr/>
+        <p:nvPr/>
+      </p:nvGrpSpPr>
+      <p:grpSpPr/>
+      <p:sp>
+        <p:nvSpPr>
+          <p:cNvPr id="2" name="文本框 1"/>
+          <p:cNvSpPr txBox="1"/>
+          <p:nvPr/>
+        </p:nvSpPr>
+        <p:spPr>
+          <a:xfrm>
+            <a:off x="2115185" y="2549525"/>
+            <a:ext cx="4229100" cy="300355"/>
+          </a:xfrm>
+          <a:prstGeom prst="rect">
+            <a:avLst/>
+          </a:prstGeom>
+          <a:noFill/>
+        </p:spPr>
+        <p:txBody>
+          <a:bodyPr wrap="square" rtlCol="0" anchor="t">
+            <a:spAutoFit/>
+          </a:bodyPr>
+          <a:p>
+            <a:pPr algn="ctr"/>
+            <a:r>
+              <a:rPr sz="680">
+                <a:solidFill>
+                  <a:srgbClr val="5F5F5F"/>
+                </a:solidFill>
+                <a:latin typeface="Arial" panose="020B0604020202020204"/>
+                <a:sym typeface="+mn-ea"/>
               </a:rPr>
               <a:t>X = 74 atom feats + 1 virtual-node bit</a:t>
             </a:r>
@@ -26642,722 +27533,27 @@
               <a:solidFill>
                 <a:srgbClr val="5F5F5F"/>
               </a:solidFill>
-              <a:latin typeface="Arial" panose="020B0604020202090204"/>
+              <a:latin typeface="Arial" panose="020B0604020202020204"/>
             </a:endParaRPr>
           </a:p>
           <a:p>
             <a:pPr algn="ctr"/>
             <a:r>
-              <a:rPr sz="680" b="0">
+              <a:rPr sz="680">
                 <a:solidFill>
                   <a:srgbClr val="5F5F5F"/>
                 </a:solidFill>
-                <a:latin typeface="Arial" panose="020B0604020202090204"/>
+                <a:latin typeface="Arial" panose="020B0604020202020204"/>
+                <a:sym typeface="+mn-ea"/>
               </a:rPr>
               <a:t>E = bond type · conjugation · ring · stereo      A = self-loops on diagonal</a:t>
             </a:r>
-            <a:endParaRPr sz="680" b="0">
+            <a:endParaRPr lang="zh-CN" altLang="en-US" sz="680">
               <a:solidFill>
                 <a:srgbClr val="5F5F5F"/>
               </a:solidFill>
-              <a:latin typeface="Arial" panose="020B0604020202090204"/>
-            </a:endParaRPr>
-          </a:p>
-        </p:txBody>
-      </p:sp>
-      <p:sp>
-        <p:nvSpPr>
-          <p:cNvPr id="501" name="Rectangle 500"/>
-          <p:cNvSpPr/>
-          <p:nvPr/>
-        </p:nvSpPr>
-        <p:spPr>
-          <a:xfrm>
-            <a:off x="5166000" y="3726000"/>
-            <a:ext cx="2520000" cy="180000"/>
-          </a:xfrm>
-          <a:prstGeom prst="rect">
-            <a:avLst/>
-          </a:prstGeom>
-          <a:noFill/>
-          <a:ln>
-            <a:noFill/>
-          </a:ln>
-          <a:effectLst/>
-        </p:spPr>
-        <p:style>
-          <a:lnRef idx="1">
-            <a:schemeClr val="accent1"/>
-          </a:lnRef>
-          <a:fillRef idx="3">
-            <a:schemeClr val="accent1"/>
-          </a:fillRef>
-          <a:effectRef idx="2">
-            <a:schemeClr val="accent1"/>
-          </a:effectRef>
-          <a:fontRef idx="minor">
-            <a:schemeClr val="lt1"/>
-          </a:fontRef>
-        </p:style>
-        <p:txBody>
-          <a:bodyPr wrap="square" lIns="28800" tIns="14400" rIns="28800" bIns="14400" rtlCol="0" anchor="t"/>
-          <a:lstStyle/>
-          <a:p>
-            <a:pPr algn="l"/>
-            <a:r>
-              <a:rPr sz="950" b="1">
-                <a:solidFill>
-                  <a:srgbClr val="B06816"/>
-                </a:solidFill>
-                <a:latin typeface="Arial" panose="020B0604020202090204"/>
-              </a:rPr>
-              <a:t>K Conformers + Energy</a:t>
-            </a:r>
-            <a:endParaRPr sz="950" b="1">
-              <a:solidFill>
-                <a:srgbClr val="B06816"/>
-              </a:solidFill>
-              <a:latin typeface="Arial" panose="020B0604020202090204"/>
-            </a:endParaRPr>
-          </a:p>
-        </p:txBody>
-      </p:sp>
-      <p:pic>
-        <p:nvPicPr>
-          <p:cNvPr id="502" name="Picture 501" descr="conf0.png"/>
-          <p:cNvPicPr>
-            <a:picLocks noChangeAspect="1"/>
-          </p:cNvPicPr>
-          <p:nvPr/>
-        </p:nvPicPr>
-        <p:blipFill>
-          <a:blip r:embed="rId2"/>
-          <a:stretch>
-            <a:fillRect/>
-          </a:stretch>
-        </p:blipFill>
-        <p:spPr>
-          <a:xfrm>
-            <a:off x="5202000" y="3978000"/>
-            <a:ext cx="546750" cy="486000"/>
-          </a:xfrm>
-          <a:prstGeom prst="rect">
-            <a:avLst/>
-          </a:prstGeom>
-        </p:spPr>
-      </p:pic>
-      <p:sp>
-        <p:nvSpPr>
-          <p:cNvPr id="503" name="Rectangle 502"/>
-          <p:cNvSpPr/>
-          <p:nvPr/>
-        </p:nvSpPr>
-        <p:spPr>
-          <a:xfrm>
-            <a:off x="5238000" y="4518000"/>
-            <a:ext cx="112500" cy="54000"/>
-          </a:xfrm>
-          <a:prstGeom prst="rect">
-            <a:avLst/>
-          </a:prstGeom>
-          <a:solidFill>
-            <a:srgbClr val="EEB65C"/>
-          </a:solidFill>
-          <a:ln>
-            <a:noFill/>
-          </a:ln>
-          <a:effectLst/>
-        </p:spPr>
-        <p:style>
-          <a:lnRef idx="1">
-            <a:schemeClr val="accent1"/>
-          </a:lnRef>
-          <a:fillRef idx="3">
-            <a:schemeClr val="accent1"/>
-          </a:fillRef>
-          <a:effectRef idx="2">
-            <a:schemeClr val="accent1"/>
-          </a:effectRef>
-          <a:fontRef idx="minor">
-            <a:schemeClr val="lt1"/>
-          </a:fontRef>
-        </p:style>
-        <p:txBody>
-          <a:bodyPr wrap="square" lIns="28800" tIns="14400" rIns="28800" bIns="14400" rtlCol="0" anchor="ctr"/>
-          <a:lstStyle/>
-          <a:p>
-            <a:pPr algn="ctr"/>
-            <a:endParaRPr sz="900" b="0">
-              <a:solidFill>
-                <a:srgbClr val="282828"/>
-              </a:solidFill>
-              <a:latin typeface="Arial" panose="020B0604020202090204"/>
-            </a:endParaRPr>
-          </a:p>
-        </p:txBody>
-      </p:sp>
-      <p:sp>
-        <p:nvSpPr>
-          <p:cNvPr id="504" name="Rectangle 503"/>
-          <p:cNvSpPr/>
-          <p:nvPr/>
-        </p:nvSpPr>
-        <p:spPr>
-          <a:xfrm>
-            <a:off x="5238000" y="4572000"/>
-            <a:ext cx="503999" cy="180000"/>
-          </a:xfrm>
-          <a:prstGeom prst="rect">
-            <a:avLst/>
-          </a:prstGeom>
-          <a:noFill/>
-          <a:ln>
-            <a:noFill/>
-          </a:ln>
-          <a:effectLst/>
-        </p:spPr>
-        <p:style>
-          <a:lnRef idx="1">
-            <a:schemeClr val="accent1"/>
-          </a:lnRef>
-          <a:fillRef idx="3">
-            <a:schemeClr val="accent1"/>
-          </a:fillRef>
-          <a:effectRef idx="2">
-            <a:schemeClr val="accent1"/>
-          </a:effectRef>
-          <a:fontRef idx="minor">
-            <a:schemeClr val="lt1"/>
-          </a:fontRef>
-        </p:style>
-        <p:txBody>
-          <a:bodyPr wrap="square" lIns="28800" tIns="14400" rIns="28800" bIns="14400" rtlCol="0" anchor="t"/>
-          <a:lstStyle/>
-          <a:p>
-            <a:pPr algn="l"/>
-            <a:r>
-              <a:rPr sz="750" b="0">
-                <a:solidFill>
-                  <a:srgbClr val="B06816"/>
-                </a:solidFill>
-                <a:latin typeface="Arial" panose="020B0604020202090204"/>
-              </a:rPr>
-              <a:t>E1</a:t>
-            </a:r>
-            <a:endParaRPr sz="750" b="0">
-              <a:solidFill>
-                <a:srgbClr val="B06816"/>
-              </a:solidFill>
-              <a:latin typeface="Arial" panose="020B0604020202090204"/>
-            </a:endParaRPr>
-          </a:p>
-        </p:txBody>
-      </p:sp>
-      <p:pic>
-        <p:nvPicPr>
-          <p:cNvPr id="505" name="Picture 504" descr="conf1.png"/>
-          <p:cNvPicPr>
-            <a:picLocks noChangeAspect="1"/>
-          </p:cNvPicPr>
-          <p:nvPr/>
-        </p:nvPicPr>
-        <p:blipFill>
-          <a:blip r:embed="rId3"/>
-          <a:stretch>
-            <a:fillRect/>
-          </a:stretch>
-        </p:blipFill>
-        <p:spPr>
-          <a:xfrm>
-            <a:off x="5742000" y="3978000"/>
-            <a:ext cx="546750" cy="486000"/>
-          </a:xfrm>
-          <a:prstGeom prst="rect">
-            <a:avLst/>
-          </a:prstGeom>
-        </p:spPr>
-      </p:pic>
-      <p:sp>
-        <p:nvSpPr>
-          <p:cNvPr id="506" name="Rectangle 505"/>
-          <p:cNvSpPr/>
-          <p:nvPr/>
-        </p:nvSpPr>
-        <p:spPr>
-          <a:xfrm>
-            <a:off x="5778000" y="4518000"/>
-            <a:ext cx="112500" cy="54000"/>
-          </a:xfrm>
-          <a:prstGeom prst="rect">
-            <a:avLst/>
-          </a:prstGeom>
-          <a:solidFill>
-            <a:srgbClr val="EEB65C"/>
-          </a:solidFill>
-          <a:ln>
-            <a:noFill/>
-          </a:ln>
-          <a:effectLst/>
-        </p:spPr>
-        <p:style>
-          <a:lnRef idx="1">
-            <a:schemeClr val="accent1"/>
-          </a:lnRef>
-          <a:fillRef idx="3">
-            <a:schemeClr val="accent1"/>
-          </a:fillRef>
-          <a:effectRef idx="2">
-            <a:schemeClr val="accent1"/>
-          </a:effectRef>
-          <a:fontRef idx="minor">
-            <a:schemeClr val="lt1"/>
-          </a:fontRef>
-        </p:style>
-        <p:txBody>
-          <a:bodyPr wrap="square" lIns="28800" tIns="14400" rIns="28800" bIns="14400" rtlCol="0" anchor="ctr"/>
-          <a:lstStyle/>
-          <a:p>
-            <a:pPr algn="ctr"/>
-            <a:endParaRPr sz="900" b="0">
-              <a:solidFill>
-                <a:srgbClr val="282828"/>
-              </a:solidFill>
-              <a:latin typeface="Arial" panose="020B0604020202090204"/>
-            </a:endParaRPr>
-          </a:p>
-        </p:txBody>
-      </p:sp>
-      <p:sp>
-        <p:nvSpPr>
-          <p:cNvPr id="507" name="Rectangle 506"/>
-          <p:cNvSpPr/>
-          <p:nvPr/>
-        </p:nvSpPr>
-        <p:spPr>
-          <a:xfrm>
-            <a:off x="5778000" y="4572000"/>
-            <a:ext cx="503999" cy="180000"/>
-          </a:xfrm>
-          <a:prstGeom prst="rect">
-            <a:avLst/>
-          </a:prstGeom>
-          <a:noFill/>
-          <a:ln>
-            <a:noFill/>
-          </a:ln>
-          <a:effectLst/>
-        </p:spPr>
-        <p:style>
-          <a:lnRef idx="1">
-            <a:schemeClr val="accent1"/>
-          </a:lnRef>
-          <a:fillRef idx="3">
-            <a:schemeClr val="accent1"/>
-          </a:fillRef>
-          <a:effectRef idx="2">
-            <a:schemeClr val="accent1"/>
-          </a:effectRef>
-          <a:fontRef idx="minor">
-            <a:schemeClr val="lt1"/>
-          </a:fontRef>
-        </p:style>
-        <p:txBody>
-          <a:bodyPr wrap="square" lIns="28800" tIns="14400" rIns="28800" bIns="14400" rtlCol="0" anchor="t"/>
-          <a:lstStyle/>
-          <a:p>
-            <a:pPr algn="l"/>
-            <a:r>
-              <a:rPr sz="750" b="0">
-                <a:solidFill>
-                  <a:srgbClr val="B06816"/>
-                </a:solidFill>
-                <a:latin typeface="Arial" panose="020B0604020202090204"/>
-              </a:rPr>
-              <a:t>E2</a:t>
-            </a:r>
-            <a:endParaRPr sz="750" b="0">
-              <a:solidFill>
-                <a:srgbClr val="B06816"/>
-              </a:solidFill>
-              <a:latin typeface="Arial" panose="020B0604020202090204"/>
-            </a:endParaRPr>
-          </a:p>
-        </p:txBody>
-      </p:sp>
-      <p:pic>
-        <p:nvPicPr>
-          <p:cNvPr id="508" name="Picture 507" descr="conf2.png"/>
-          <p:cNvPicPr>
-            <a:picLocks noChangeAspect="1"/>
-          </p:cNvPicPr>
-          <p:nvPr/>
-        </p:nvPicPr>
-        <p:blipFill>
-          <a:blip r:embed="rId4"/>
-          <a:stretch>
-            <a:fillRect/>
-          </a:stretch>
-        </p:blipFill>
-        <p:spPr>
-          <a:xfrm>
-            <a:off x="6282000" y="3978000"/>
-            <a:ext cx="546750" cy="486000"/>
-          </a:xfrm>
-          <a:prstGeom prst="rect">
-            <a:avLst/>
-          </a:prstGeom>
-        </p:spPr>
-      </p:pic>
-      <p:sp>
-        <p:nvSpPr>
-          <p:cNvPr id="509" name="Rectangle 508"/>
-          <p:cNvSpPr/>
-          <p:nvPr/>
-        </p:nvSpPr>
-        <p:spPr>
-          <a:xfrm>
-            <a:off x="6318000" y="4518000"/>
-            <a:ext cx="450000" cy="54000"/>
-          </a:xfrm>
-          <a:prstGeom prst="rect">
-            <a:avLst/>
-          </a:prstGeom>
-          <a:solidFill>
-            <a:srgbClr val="EEB65C"/>
-          </a:solidFill>
-          <a:ln>
-            <a:noFill/>
-          </a:ln>
-          <a:effectLst/>
-        </p:spPr>
-        <p:style>
-          <a:lnRef idx="1">
-            <a:schemeClr val="accent1"/>
-          </a:lnRef>
-          <a:fillRef idx="3">
-            <a:schemeClr val="accent1"/>
-          </a:fillRef>
-          <a:effectRef idx="2">
-            <a:schemeClr val="accent1"/>
-          </a:effectRef>
-          <a:fontRef idx="minor">
-            <a:schemeClr val="lt1"/>
-          </a:fontRef>
-        </p:style>
-        <p:txBody>
-          <a:bodyPr wrap="square" lIns="28800" tIns="14400" rIns="28800" bIns="14400" rtlCol="0" anchor="ctr"/>
-          <a:lstStyle/>
-          <a:p>
-            <a:pPr algn="ctr"/>
-            <a:endParaRPr sz="900" b="0">
-              <a:solidFill>
-                <a:srgbClr val="282828"/>
-              </a:solidFill>
-              <a:latin typeface="Arial" panose="020B0604020202090204"/>
-            </a:endParaRPr>
-          </a:p>
-        </p:txBody>
-      </p:sp>
-      <p:sp>
-        <p:nvSpPr>
-          <p:cNvPr id="510" name="Rectangle 509"/>
-          <p:cNvSpPr/>
-          <p:nvPr/>
-        </p:nvSpPr>
-        <p:spPr>
-          <a:xfrm>
-            <a:off x="6318000" y="4572000"/>
-            <a:ext cx="503999" cy="180000"/>
-          </a:xfrm>
-          <a:prstGeom prst="rect">
-            <a:avLst/>
-          </a:prstGeom>
-          <a:noFill/>
-          <a:ln>
-            <a:noFill/>
-          </a:ln>
-          <a:effectLst/>
-        </p:spPr>
-        <p:style>
-          <a:lnRef idx="1">
-            <a:schemeClr val="accent1"/>
-          </a:lnRef>
-          <a:fillRef idx="3">
-            <a:schemeClr val="accent1"/>
-          </a:fillRef>
-          <a:effectRef idx="2">
-            <a:schemeClr val="accent1"/>
-          </a:effectRef>
-          <a:fontRef idx="minor">
-            <a:schemeClr val="lt1"/>
-          </a:fontRef>
-        </p:style>
-        <p:txBody>
-          <a:bodyPr wrap="square" lIns="28800" tIns="14400" rIns="28800" bIns="14400" rtlCol="0" anchor="t"/>
-          <a:lstStyle/>
-          <a:p>
-            <a:pPr algn="l"/>
-            <a:r>
-              <a:rPr sz="750" b="0">
-                <a:solidFill>
-                  <a:srgbClr val="B06816"/>
-                </a:solidFill>
-                <a:latin typeface="Arial" panose="020B0604020202090204"/>
-              </a:rPr>
-              <a:t>E3</a:t>
-            </a:r>
-            <a:endParaRPr sz="750" b="0">
-              <a:solidFill>
-                <a:srgbClr val="B06816"/>
-              </a:solidFill>
-              <a:latin typeface="Arial" panose="020B0604020202090204"/>
-            </a:endParaRPr>
-          </a:p>
-        </p:txBody>
-      </p:sp>
-      <p:sp>
-        <p:nvSpPr>
-          <p:cNvPr id="511" name="Rectangle 510"/>
-          <p:cNvSpPr/>
-          <p:nvPr/>
-        </p:nvSpPr>
-        <p:spPr>
-          <a:xfrm>
-            <a:off x="5202000" y="4752000"/>
-            <a:ext cx="1655999" cy="180000"/>
-          </a:xfrm>
-          <a:prstGeom prst="rect">
-            <a:avLst/>
-          </a:prstGeom>
-          <a:noFill/>
-          <a:ln>
-            <a:noFill/>
-          </a:ln>
-          <a:effectLst/>
-        </p:spPr>
-        <p:style>
-          <a:lnRef idx="1">
-            <a:schemeClr val="accent1"/>
-          </a:lnRef>
-          <a:fillRef idx="3">
-            <a:schemeClr val="accent1"/>
-          </a:fillRef>
-          <a:effectRef idx="2">
-            <a:schemeClr val="accent1"/>
-          </a:effectRef>
-          <a:fontRef idx="minor">
-            <a:schemeClr val="lt1"/>
-          </a:fontRef>
-        </p:style>
-        <p:txBody>
-          <a:bodyPr wrap="square" lIns="28800" tIns="14400" rIns="28800" bIns="14400" rtlCol="0" anchor="t"/>
-          <a:lstStyle/>
-          <a:p>
-            <a:pPr algn="ctr"/>
-            <a:r>
-              <a:rPr sz="750" b="0">
-                <a:solidFill>
-                  <a:srgbClr val="5F5F5F"/>
-                </a:solidFill>
-                <a:latin typeface="Arial" panose="020B0604020202090204"/>
-              </a:rPr>
-              <a:t>K conformers  ·  sorted by energy </a:t>
-            </a:r>
-            <a:endParaRPr sz="750" b="0">
-              <a:solidFill>
-                <a:srgbClr val="5F5F5F"/>
-              </a:solidFill>
-              <a:latin typeface="Arial" panose="020B0604020202090204"/>
-            </a:endParaRPr>
-          </a:p>
-        </p:txBody>
-      </p:sp>
-      <p:sp>
-        <p:nvSpPr>
-          <p:cNvPr id="512" name="Rectangle 511"/>
-          <p:cNvSpPr/>
-          <p:nvPr/>
-        </p:nvSpPr>
-        <p:spPr>
-          <a:xfrm>
-            <a:off x="6948000" y="3960000"/>
-            <a:ext cx="1296000" cy="972000"/>
-          </a:xfrm>
-          <a:prstGeom prst="rect">
-            <a:avLst/>
-          </a:prstGeom>
-          <a:noFill/>
-          <a:ln>
-            <a:noFill/>
-          </a:ln>
-          <a:effectLst/>
-        </p:spPr>
-        <p:style>
-          <a:lnRef idx="1">
-            <a:schemeClr val="accent1"/>
-          </a:lnRef>
-          <a:fillRef idx="3">
-            <a:schemeClr val="accent1"/>
-          </a:fillRef>
-          <a:effectRef idx="2">
-            <a:schemeClr val="accent1"/>
-          </a:effectRef>
-          <a:fontRef idx="minor">
-            <a:schemeClr val="lt1"/>
-          </a:fontRef>
-        </p:style>
-        <p:txBody>
-          <a:bodyPr wrap="square" lIns="18000" tIns="10800" rIns="18000" bIns="10800" rtlCol="0" anchor="ctr"/>
-          <a:lstStyle/>
-          <a:p>
-            <a:pPr algn="l">
-              <a:spcAft>
-                <a:spcPts val="300"/>
-              </a:spcAft>
-            </a:pPr>
-            <a:r>
-              <a:rPr sz="850" b="1">
-                <a:solidFill>
-                  <a:srgbClr val="B06816"/>
-                </a:solidFill>
-                <a:latin typeface="Arial" panose="020B0604020202090204"/>
-              </a:rPr>
-              <a:t>atom feats  </a:t>
-            </a:r>
-            <a:r>
-              <a:rPr sz="850" b="1">
-                <a:solidFill>
-                  <a:srgbClr val="282828"/>
-                </a:solidFill>
-                <a:latin typeface="Consolas"/>
-              </a:rPr>
-              <a:t>[K×64×128]</a:t>
-            </a:r>
-            <a:endParaRPr sz="850" b="1">
-              <a:solidFill>
-                <a:srgbClr val="282828"/>
-              </a:solidFill>
-              <a:latin typeface="Consolas"/>
-            </a:endParaRPr>
-          </a:p>
-          <a:p>
-            <a:pPr algn="l">
-              <a:spcAft>
-                <a:spcPts val="300"/>
-              </a:spcAft>
-            </a:pPr>
-            <a:r>
-              <a:rPr sz="850" b="1">
-                <a:solidFill>
-                  <a:srgbClr val="B06816"/>
-                </a:solidFill>
-                <a:latin typeface="Arial" panose="020B0604020202090204"/>
-              </a:rPr>
-              <a:t>coords  </a:t>
-            </a:r>
-            <a:r>
-              <a:rPr sz="850" b="1">
-                <a:solidFill>
-                  <a:srgbClr val="282828"/>
-                </a:solidFill>
-                <a:latin typeface="Consolas"/>
-              </a:rPr>
-              <a:t>[K×64×3]</a:t>
-            </a:r>
-            <a:r>
-              <a:rPr sz="750" b="0">
-                <a:solidFill>
-                  <a:srgbClr val="787878"/>
-                </a:solidFill>
-                <a:latin typeface="Arial" panose="020B0604020202090204"/>
-              </a:rPr>
-              <a:t>  (x,y,z)</a:t>
-            </a:r>
-            <a:endParaRPr sz="750" b="0">
-              <a:solidFill>
-                <a:srgbClr val="787878"/>
-              </a:solidFill>
-              <a:latin typeface="Arial" panose="020B0604020202090204"/>
-            </a:endParaRPr>
-          </a:p>
-          <a:p>
-            <a:pPr algn="l">
-              <a:spcAft>
-                <a:spcPts val="300"/>
-              </a:spcAft>
-            </a:pPr>
-            <a:r>
-              <a:rPr sz="850" b="1">
-                <a:solidFill>
-                  <a:srgbClr val="B06816"/>
-                </a:solidFill>
-                <a:latin typeface="Arial" panose="020B0604020202090204"/>
-              </a:rPr>
-              <a:t>energy  </a:t>
-            </a:r>
-            <a:r>
-              <a:rPr sz="850" b="1">
-                <a:solidFill>
-                  <a:srgbClr val="282828"/>
-                </a:solidFill>
-                <a:latin typeface="Consolas"/>
-              </a:rPr>
-              <a:t>[K]</a:t>
-            </a:r>
-            <a:r>
-              <a:rPr sz="750" b="0">
-                <a:solidFill>
-                  <a:srgbClr val="787878"/>
-                </a:solidFill>
-                <a:latin typeface="Arial" panose="020B0604020202090204"/>
-              </a:rPr>
-              <a:t>  UFF → z-score</a:t>
-            </a:r>
-            <a:endParaRPr sz="750" b="0">
-              <a:solidFill>
-                <a:srgbClr val="787878"/>
-              </a:solidFill>
-              <a:latin typeface="Arial" panose="020B0604020202090204"/>
-            </a:endParaRPr>
-          </a:p>
-          <a:p>
-            <a:pPr algn="l">
-              <a:spcAft>
-                <a:spcPts val="300"/>
-              </a:spcAft>
-            </a:pPr>
-            <a:r>
-              <a:rPr sz="850" b="1">
-                <a:solidFill>
-                  <a:srgbClr val="B06816"/>
-                </a:solidFill>
-                <a:latin typeface="Arial" panose="020B0604020202090204"/>
-              </a:rPr>
-              <a:t>conf_mask  </a:t>
-            </a:r>
-            <a:r>
-              <a:rPr sz="850" b="1">
-                <a:solidFill>
-                  <a:srgbClr val="282828"/>
-                </a:solidFill>
-                <a:latin typeface="Consolas"/>
-              </a:rPr>
-              <a:t>[K]</a:t>
-            </a:r>
-            <a:r>
-              <a:rPr sz="750" b="0">
-                <a:solidFill>
-                  <a:srgbClr val="787878"/>
-                </a:solidFill>
-                <a:latin typeface="Arial" panose="020B0604020202090204"/>
-              </a:rPr>
-              <a:t>  valid confs</a:t>
-            </a:r>
-            <a:endParaRPr sz="750" b="0">
-              <a:solidFill>
-                <a:srgbClr val="787878"/>
-              </a:solidFill>
-              <a:latin typeface="Arial" panose="020B0604020202090204"/>
+              <a:latin typeface="Arial" panose="020B0604020202020204"/>
+              <a:sym typeface="+mn-ea"/>
             </a:endParaRPr>
           </a:p>
         </p:txBody>
